--- a/teaching/out/BACalc_AI.pptx
+++ b/teaching/out/BACalc_AI.pptx
@@ -12906,7 +12906,7 @@
                 <a:ea typeface="微軟正黑體"/>
                 <a:cs typeface="微軟正黑體"/>
               </a:rPr>
-              <a:t>AI 只在對話裡給三行計畫就問要不要開始寫（使用者層級規則要求先給計畫），docs/ 沒有計畫檔、沒比較執行環境大小，三條驗收指令都找不到檔案（2026-10-21 替身演練）</a:t>
+              <a:t>AI 只在對話裡給三行計畫就問要不要開始寫（使用者層級規則要求先給計畫），docs/ 沒有計畫檔、沒比較執行環境大小；兩條驗收指令找不到檔案、一條（claude -p）無法執行（2026-10-21 替身演練）</a:t>
             </a:r>
           </a:p>
         </p:txBody>
